--- a/R语言复现/Christensen研究复现性检验报告-3.pptx
+++ b/R语言复现/Christensen研究复现性检验报告-3.pptx
@@ -358,7 +358,7 @@
           <a:p>
             <a:fld id="{B7268E1E-0E44-426D-905E-8AD9B19D2182}" type="datetimeFigureOut">
               <a:rPr lang="cs-CZ" smtClean="0"/>
-              <a:t>23.06.2026</a:t>
+              <a:t>24.06.2026</a:t>
             </a:fld>
             <a:endParaRPr lang="cs-CZ"/>
           </a:p>
@@ -720,8 +720,8 @@
         </p:nvSpPr>
         <p:spPr>
           <a:xfrm>
-            <a:off x="2857500" y="512763"/>
-            <a:ext cx="3429000" cy="2566987"/>
+            <a:off x="2290763" y="512763"/>
+            <a:ext cx="4562475" cy="2566987"/>
           </a:xfrm>
           <a:prstGeom prst="rect">
             <a:avLst/>
@@ -15517,7 +15517,7 @@
               <a:defRPr/>
             </a:pPr>
             <a:r>
-              <a:rPr lang="en-US" sz="1800" b="0" i="0" u="none" strike="noStrike">
+              <a:rPr lang="en-US" sz="1800" b="0" i="0" u="none" strike="noStrike" err="1">
                 <a:solidFill>
                   <a:srgbClr val="666666"/>
                 </a:solidFill>
@@ -15526,7 +15526,19 @@
                 <a:cs typeface="Noto Sans SC"/>
                 <a:sym typeface="Noto Sans SC"/>
               </a:rPr>
-              <a:t>汇报人：[你的名字] 日期：2026年6月</a:t>
+              <a:t>汇报人</a:t>
+            </a:r>
+            <a:r>
+              <a:rPr lang="en-US" sz="1800" b="0" i="0" u="none" strike="noStrike">
+                <a:solidFill>
+                  <a:srgbClr val="666666"/>
+                </a:solidFill>
+                <a:latin typeface="Noto Sans SC"/>
+                <a:ea typeface="Noto Sans SC"/>
+                <a:cs typeface="Noto Sans SC"/>
+                <a:sym typeface="Noto Sans SC"/>
+              </a:rPr>
+              <a:t>：林敏诗 日期：2026年6月</a:t>
             </a:r>
             <a:endParaRPr lang="en-US" sz="1100"/>
           </a:p>
